--- a/songs/song-02/song.pptx
+++ b/songs/song-02/song.pptx
@@ -5,14 +5,13 @@
     <p:sldMasterId id="2147483695" r:id="rId1"/>
   </p:sldMasterIdLst>
   <p:sldIdLst>
-    <p:sldId id="256" r:id="rId56"/>
-    <p:sldId id="257" r:id="rId57"/>
-    <p:sldId id="258" r:id="rId58"/>
-    <p:sldId id="259" r:id="rId59"/>
-    <p:sldId id="260" r:id="rId60"/>
-    <p:sldId id="261" r:id="rId61"/>
-    <p:sldId id="262" r:id="rId62"/>
-    <p:sldId id="263" r:id="rId63"/>
+    <p:sldId id="256" r:id="rId2"/>
+    <p:sldId id="257" r:id="rId3"/>
+    <p:sldId id="258" r:id="rId4"/>
+    <p:sldId id="260" r:id="rId5"/>
+    <p:sldId id="261" r:id="rId6"/>
+    <p:sldId id="262" r:id="rId7"/>
+    <p:sldId id="263" r:id="rId8"/>
   </p:sldIdLst>
   <p:sldSz cx="12192000" cy="6858000"/>
   <p:notesSz cx="6858000" cy="9144000"/>
@@ -271,7 +270,7 @@
               <a:pPr lvl="0">
                 <a:defRPr/>
               </a:pPr>
-              <a:t>2026. 6. 19.</a:t>
+              <a:t>2026. 6. 21.</a:t>
             </a:fld>
             <a:endParaRPr lang="ko-KR" altLang="en-US"/>
           </a:p>
@@ -463,7 +462,7 @@
               <a:pPr lvl="0">
                 <a:defRPr/>
               </a:pPr>
-              <a:t>2026. 6. 19.</a:t>
+              <a:t>2026. 6. 21.</a:t>
             </a:fld>
             <a:endParaRPr lang="ko-KR" altLang="en-US"/>
           </a:p>
@@ -665,7 +664,7 @@
               <a:pPr lvl="0">
                 <a:defRPr/>
               </a:pPr>
-              <a:t>2026. 6. 19.</a:t>
+              <a:t>2026. 6. 21.</a:t>
             </a:fld>
             <a:endParaRPr lang="ko-KR" altLang="en-US"/>
           </a:p>
@@ -865,7 +864,7 @@
               <a:pPr lvl="0">
                 <a:defRPr/>
               </a:pPr>
-              <a:t>2026. 6. 19.</a:t>
+              <a:t>2026. 6. 21.</a:t>
             </a:fld>
             <a:endParaRPr lang="ko-KR" altLang="en-US"/>
           </a:p>
@@ -1126,7 +1125,7 @@
               <a:pPr lvl="0">
                 <a:defRPr/>
               </a:pPr>
-              <a:t>2026. 6. 19.</a:t>
+              <a:t>2026. 6. 21.</a:t>
             </a:fld>
             <a:endParaRPr lang="ko-KR" altLang="en-US"/>
           </a:p>
@@ -1389,7 +1388,7 @@
               <a:pPr lvl="0">
                 <a:defRPr/>
               </a:pPr>
-              <a:t>2026. 6. 19.</a:t>
+              <a:t>2026. 6. 21.</a:t>
             </a:fld>
             <a:endParaRPr lang="ko-KR" altLang="en-US"/>
           </a:p>
@@ -1791,7 +1790,7 @@
               <a:pPr lvl="0">
                 <a:defRPr/>
               </a:pPr>
-              <a:t>2026. 6. 19.</a:t>
+              <a:t>2026. 6. 21.</a:t>
             </a:fld>
             <a:endParaRPr lang="ko-KR" altLang="en-US"/>
           </a:p>
@@ -1922,7 +1921,7 @@
               <a:pPr lvl="0">
                 <a:defRPr/>
               </a:pPr>
-              <a:t>2026. 6. 19.</a:t>
+              <a:t>2026. 6. 21.</a:t>
             </a:fld>
             <a:endParaRPr lang="ko-KR" altLang="en-US"/>
           </a:p>
@@ -2028,7 +2027,7 @@
               <a:pPr lvl="0">
                 <a:defRPr/>
               </a:pPr>
-              <a:t>2026. 6. 19.</a:t>
+              <a:t>2026. 6. 21.</a:t>
             </a:fld>
             <a:endParaRPr lang="ko-KR" altLang="en-US"/>
           </a:p>
@@ -2329,7 +2328,7 @@
               <a:pPr lvl="0">
                 <a:defRPr/>
               </a:pPr>
-              <a:t>2026. 6. 19.</a:t>
+              <a:t>2026. 6. 21.</a:t>
             </a:fld>
             <a:endParaRPr lang="ko-KR" altLang="en-US"/>
           </a:p>
@@ -2600,7 +2599,7 @@
               <a:pPr lvl="0">
                 <a:defRPr/>
               </a:pPr>
-              <a:t>2026. 6. 19.</a:t>
+              <a:t>2026. 6. 21.</a:t>
             </a:fld>
             <a:endParaRPr lang="ko-KR" altLang="en-US"/>
           </a:p>
@@ -2838,7 +2837,7 @@
               <a:pPr lvl="0">
                 <a:defRPr/>
               </a:pPr>
-              <a:t>2026. 6. 19.</a:t>
+              <a:t>2026. 6. 21.</a:t>
             </a:fld>
             <a:endParaRPr lang="ko-KR" altLang="en-US"/>
           </a:p>
@@ -3300,25 +3299,6 @@
               <a:defRPr/>
             </a:pPr>
             <a:r>
-              <a:rPr kumimoji="0" lang="en-US" altLang="ko-KR" sz="9600" b="1" i="0" u="none" strike="noStrike" kern="1200" cap="none" spc="-300" normalizeH="0" baseline="0" noProof="0" dirty="0">
-                <a:ln w="9525">
-                  <a:solidFill>
-                    <a:prstClr val="black"/>
-                  </a:solidFill>
-                </a:ln>
-                <a:solidFill>
-                  <a:srgbClr val="FFFF00"/>
-                </a:solidFill>
-                <a:effectLst/>
-                <a:uLnTx/>
-                <a:uFillTx/>
-                <a:latin typeface="휴먼모음T" panose="02030504000101010101" pitchFamily="18" charset="-127"/>
-                <a:ea typeface="휴먼모음T" panose="02030504000101010101" pitchFamily="18" charset="-127"/>
-                <a:cs typeface="+mn-cs"/>
-              </a:rPr>
-              <a:t>2. </a:t>
-            </a:r>
-            <a:r>
               <a:rPr kumimoji="0" lang="ko-KR" altLang="en-US" sz="9600" b="1" i="0" u="none" strike="noStrike" kern="1200" cap="none" spc="-300" normalizeH="0" baseline="0" noProof="0" dirty="0">
                 <a:ln w="9525">
                   <a:solidFill>
@@ -3337,41 +3317,6 @@
               </a:rPr>
               <a:t>생명 주께 있네</a:t>
             </a:r>
-            <a:endParaRPr kumimoji="0" lang="en-US" altLang="ko-KR" sz="9600" b="1" i="0" u="none" strike="noStrike" kern="1200" cap="none" spc="-300" normalizeH="0" baseline="0" noProof="0" dirty="0">
-              <a:ln w="9525">
-                <a:solidFill>
-                  <a:prstClr val="black"/>
-                </a:solidFill>
-              </a:ln>
-              <a:solidFill>
-                <a:srgbClr val="FFFF00"/>
-              </a:solidFill>
-              <a:effectLst/>
-              <a:uLnTx/>
-              <a:uFillTx/>
-              <a:latin typeface="휴먼모음T" panose="02030504000101010101" pitchFamily="18" charset="-127"/>
-              <a:ea typeface="휴먼모음T" panose="02030504000101010101" pitchFamily="18" charset="-127"/>
-              <a:cs typeface="+mn-cs"/>
-            </a:endParaRPr>
-          </a:p>
-          <a:p>
-            <a:pPr marL="0" marR="0" lvl="0" indent="0" algn="ctr" defTabSz="914400" rtl="0" eaLnBrk="1" fontAlgn="auto" latinLnBrk="1" hangingPunct="1">
-              <a:lnSpc>
-                <a:spcPct val="100000"/>
-              </a:lnSpc>
-              <a:spcBef>
-                <a:spcPts val="0"/>
-              </a:spcBef>
-              <a:spcAft>
-                <a:spcPts val="0"/>
-              </a:spcAft>
-              <a:buClrTx/>
-              <a:buSzTx/>
-              <a:buFontTx/>
-              <a:buNone/>
-              <a:tabLst/>
-              <a:defRPr/>
-            </a:pPr>
             <a:r>
               <a:rPr lang="en-US" altLang="ko-KR" sz="9600" b="1" spc="-300" dirty="0">
                 <a:ln w="9525">
@@ -3385,7 +3330,7 @@
                 <a:latin typeface="휴먼모음T" panose="02030504000101010101" pitchFamily="18" charset="-127"/>
                 <a:ea typeface="휴먼모음T" panose="02030504000101010101" pitchFamily="18" charset="-127"/>
               </a:rPr>
-              <a:t>+ </a:t>
+              <a:t>+</a:t>
             </a:r>
             <a:r>
               <a:rPr lang="ko-KR" altLang="en-US" sz="9600" b="1" spc="-300" dirty="0">
@@ -4018,7 +3963,7 @@
         <p:cNvPr id="1" name="">
           <a:extLst>
             <a:ext uri="{FF2B5EF4-FFF2-40B4-BE49-F238E27FC236}">
-              <a16:creationId xmlns:a16="http://schemas.microsoft.com/office/drawing/2014/main" id="{73D3FD92-9017-0CCC-589D-D1C128CF776B}"/>
+              <a16:creationId xmlns:a16="http://schemas.microsoft.com/office/drawing/2014/main" id="{F1A22829-1471-F0C9-5F67-8B6AFA63C7E7}"/>
             </a:ext>
           </a:extLst>
         </p:cNvPr>
@@ -4038,7 +3983,7 @@
           <p:cNvPr id="2" name="TextBox 1">
             <a:extLst>
               <a:ext uri="{FF2B5EF4-FFF2-40B4-BE49-F238E27FC236}">
-                <a16:creationId xmlns:a16="http://schemas.microsoft.com/office/drawing/2014/main" id="{D841C041-0FC3-25BB-FBF0-18D0D5C378B8}"/>
+                <a16:creationId xmlns:a16="http://schemas.microsoft.com/office/drawing/2014/main" id="{B143E221-FB5F-DF57-01A2-0859509884A4}"/>
               </a:ext>
             </a:extLst>
           </p:cNvPr>
@@ -4079,6 +4024,21 @@
               <a:defRPr/>
             </a:pPr>
             <a:r>
+              <a:rPr lang="en-US" altLang="ko-KR" sz="7200" b="1" spc="-300" dirty="0">
+                <a:ln w="9525">
+                  <a:solidFill>
+                    <a:prstClr val="black"/>
+                  </a:solidFill>
+                </a:ln>
+                <a:solidFill>
+                  <a:prstClr val="white"/>
+                </a:solidFill>
+                <a:latin typeface="휴먼모음T" panose="02030504000101010101" pitchFamily="18" charset="-127"/>
+                <a:ea typeface="휴먼모음T" panose="02030504000101010101" pitchFamily="18" charset="-127"/>
+              </a:rPr>
+              <a:t>Ca</a:t>
+            </a:r>
+            <a:r>
               <a:rPr kumimoji="0" lang="en-US" altLang="ko-KR" sz="7200" b="1" i="0" u="none" strike="noStrike" kern="1200" cap="none" spc="-300" normalizeH="0" baseline="0" noProof="0" dirty="0">
                 <a:ln w="9525">
                   <a:solidFill>
@@ -4095,10 +4055,10 @@
                 <a:ea typeface="휴먼모음T" panose="02030504000101010101" pitchFamily="18" charset="-127"/>
                 <a:cs typeface="+mn-cs"/>
               </a:rPr>
-              <a:t>A </a:t>
-            </a:r>
-            <a:r>
-              <a:rPr kumimoji="0" lang="ko-Kore-KR" altLang="en-US" sz="7200" b="1" i="0" u="none" strike="noStrike" kern="1200" cap="none" spc="-300" normalizeH="0" baseline="0" noProof="0" dirty="0">
+              <a:t> </a:t>
+            </a:r>
+            <a:r>
+              <a:rPr kumimoji="0" lang="ko-KR" altLang="en-US" sz="7200" b="1" i="0" u="none" strike="noStrike" kern="1200" cap="none" spc="-300" normalizeH="0" baseline="0" noProof="0" dirty="0">
                 <a:ln w="9525">
                   <a:solidFill>
                     <a:prstClr val="black"/>
@@ -4114,9 +4074,9 @@
                 <a:ea typeface="휴먼모음T" panose="02030504000101010101" pitchFamily="18" charset="-127"/>
                 <a:cs typeface="+mn-cs"/>
               </a:rPr>
-              <a:t>생명 주께 있네</a:t>
-            </a:r>
-            <a:endParaRPr kumimoji="0" lang="en-US" altLang="ko-Kore-KR" sz="7200" b="1" i="0" u="none" strike="noStrike" kern="1200" cap="none" spc="-300" normalizeH="0" baseline="0" noProof="0" dirty="0">
+              <a:t>주 날 구원했으니</a:t>
+            </a:r>
+            <a:endParaRPr kumimoji="0" lang="en-US" altLang="ko-KR" sz="7200" b="1" i="0" u="none" strike="noStrike" kern="1200" cap="none" spc="-300" normalizeH="0" baseline="0" noProof="0" dirty="0">
               <a:ln w="9525">
                 <a:solidFill>
                   <a:prstClr val="black"/>
@@ -4152,7 +4112,7 @@
               <a:defRPr/>
             </a:pPr>
             <a:r>
-              <a:rPr lang="ko-Kore-KR" altLang="en-US" sz="7200" b="1" spc="-300" dirty="0">
+              <a:rPr kumimoji="0" lang="ko-KR" altLang="en-US" sz="7200" b="1" i="0" u="none" strike="noStrike" kern="1200" cap="none" spc="-300" normalizeH="0" baseline="0" noProof="0" dirty="0">
                 <a:ln w="9525">
                   <a:solidFill>
                     <a:prstClr val="black"/>
@@ -4161,12 +4121,16 @@
                 <a:solidFill>
                   <a:prstClr val="white"/>
                 </a:solidFill>
+                <a:effectLst/>
+                <a:uLnTx/>
+                <a:uFillTx/>
                 <a:latin typeface="휴먼모음T" panose="02030504000101010101" pitchFamily="18" charset="-127"/>
                 <a:ea typeface="휴먼모음T" panose="02030504000101010101" pitchFamily="18" charset="-127"/>
+                <a:cs typeface="+mn-cs"/>
               </a:rPr>
-              <a:t>능력 주께 있네</a:t>
-            </a:r>
-            <a:endParaRPr lang="en-US" altLang="ko-Kore-KR" sz="7200" b="1" spc="-300" dirty="0">
+              <a:t>어찌 잠잠하리</a:t>
+            </a:r>
+            <a:endParaRPr kumimoji="0" lang="en-US" altLang="ko-KR" sz="7200" b="1" i="0" u="none" strike="noStrike" kern="1200" cap="none" spc="-300" normalizeH="0" baseline="0" noProof="0" dirty="0">
               <a:ln w="9525">
                 <a:solidFill>
                   <a:prstClr val="black"/>
@@ -4175,8 +4139,12 @@
               <a:solidFill>
                 <a:prstClr val="white"/>
               </a:solidFill>
+              <a:effectLst/>
+              <a:uLnTx/>
+              <a:uFillTx/>
               <a:latin typeface="휴먼모음T" panose="02030504000101010101" pitchFamily="18" charset="-127"/>
               <a:ea typeface="휴먼모음T" panose="02030504000101010101" pitchFamily="18" charset="-127"/>
+              <a:cs typeface="+mn-cs"/>
             </a:endParaRPr>
           </a:p>
           <a:p>
@@ -4198,7 +4166,7 @@
               <a:defRPr/>
             </a:pPr>
             <a:r>
-              <a:rPr lang="ko-Kore-KR" altLang="en-US" sz="7200" b="1" spc="-300" dirty="0">
+              <a:rPr lang="ko-KR" altLang="en-US" sz="7200" b="1" spc="-300" dirty="0">
                 <a:ln w="9525">
                   <a:solidFill>
                     <a:prstClr val="black"/>
@@ -4210,9 +4178,24 @@
                 <a:latin typeface="휴먼모음T" panose="02030504000101010101" pitchFamily="18" charset="-127"/>
                 <a:ea typeface="휴먼모음T" panose="02030504000101010101" pitchFamily="18" charset="-127"/>
               </a:rPr>
-              <a:t>소망 주께 있네</a:t>
-            </a:r>
-            <a:endParaRPr lang="en-US" altLang="ko-Kore-KR" sz="7200" b="1" spc="-300" dirty="0">
+              <a:t>기쁨의 </a:t>
+            </a:r>
+            <a:r>
+              <a:rPr lang="ko-KR" altLang="en-US" sz="7200" b="1" spc="-300" dirty="0" err="1">
+                <a:ln w="9525">
+                  <a:solidFill>
+                    <a:prstClr val="black"/>
+                  </a:solidFill>
+                </a:ln>
+                <a:solidFill>
+                  <a:prstClr val="white"/>
+                </a:solidFill>
+                <a:latin typeface="휴먼모음T" panose="02030504000101010101" pitchFamily="18" charset="-127"/>
+                <a:ea typeface="휴먼모음T" panose="02030504000101010101" pitchFamily="18" charset="-127"/>
+              </a:rPr>
+              <a:t>찬송드리리</a:t>
+            </a:r>
+            <a:endParaRPr lang="en-US" altLang="ko-KR" sz="7200" b="1" spc="-300" dirty="0">
               <a:ln w="9525">
                 <a:solidFill>
                   <a:prstClr val="black"/>
@@ -4225,139 +4208,12 @@
               <a:ea typeface="휴먼모음T" panose="02030504000101010101" pitchFamily="18" charset="-127"/>
             </a:endParaRPr>
           </a:p>
-          <a:p>
-            <a:pPr marL="0" marR="0" lvl="0" indent="0" algn="ctr" defTabSz="914400" rtl="0" eaLnBrk="1" fontAlgn="auto" latinLnBrk="1" hangingPunct="1">
-              <a:lnSpc>
-                <a:spcPct val="100000"/>
-              </a:lnSpc>
-              <a:spcBef>
-                <a:spcPts val="0"/>
-              </a:spcBef>
-              <a:spcAft>
-                <a:spcPts val="0"/>
-              </a:spcAft>
-              <a:buClrTx/>
-              <a:buSzTx/>
-              <a:buFontTx/>
-              <a:buNone/>
-              <a:tabLst/>
-              <a:defRPr/>
-            </a:pPr>
-            <a:r>
-              <a:rPr lang="ko-Kore-KR" altLang="en-US" sz="7200" b="1" spc="-300" dirty="0">
-                <a:ln w="9525">
-                  <a:solidFill>
-                    <a:prstClr val="black"/>
-                  </a:solidFill>
-                </a:ln>
-                <a:solidFill>
-                  <a:prstClr val="white"/>
-                </a:solidFill>
-                <a:latin typeface="휴먼모음T" panose="02030504000101010101" pitchFamily="18" charset="-127"/>
-                <a:ea typeface="휴먼모음T" panose="02030504000101010101" pitchFamily="18" charset="-127"/>
-              </a:rPr>
-              <a:t>주 안에 있네</a:t>
-            </a:r>
-            <a:endParaRPr lang="en-US" altLang="ko-Kore-KR" sz="7200" b="1" spc="-300" dirty="0">
-              <a:ln w="9525">
-                <a:solidFill>
-                  <a:prstClr val="black"/>
-                </a:solidFill>
-              </a:ln>
-              <a:solidFill>
-                <a:prstClr val="white"/>
-              </a:solidFill>
-              <a:latin typeface="휴먼모음T" panose="02030504000101010101" pitchFamily="18" charset="-127"/>
-              <a:ea typeface="휴먼모음T" panose="02030504000101010101" pitchFamily="18" charset="-127"/>
-            </a:endParaRPr>
-          </a:p>
-          <a:p>
-            <a:pPr algn="ctr">
-              <a:defRPr/>
-            </a:pPr>
-            <a:r>
-              <a:rPr lang="en-US" altLang="ko-KR" sz="4800" b="1" spc="-300" dirty="0">
-                <a:ln w="9525">
-                  <a:solidFill>
-                    <a:prstClr val="black"/>
-                  </a:solidFill>
-                </a:ln>
-                <a:solidFill>
-                  <a:srgbClr val="FFFF00"/>
-                </a:solidFill>
-                <a:latin typeface="휴먼모음T" panose="02030504000101010101" pitchFamily="18" charset="-127"/>
-                <a:ea typeface="휴먼모음T" panose="02030504000101010101" pitchFamily="18" charset="-127"/>
-              </a:rPr>
-              <a:t>(</a:t>
-            </a:r>
-            <a:r>
-              <a:rPr lang="ko-KR" altLang="en-US" sz="4800" b="1" spc="-300" dirty="0">
-                <a:ln w="9525">
-                  <a:solidFill>
-                    <a:prstClr val="black"/>
-                  </a:solidFill>
-                </a:ln>
-                <a:solidFill>
-                  <a:srgbClr val="FFFF00"/>
-                </a:solidFill>
-                <a:latin typeface="휴먼모음T" panose="02030504000101010101" pitchFamily="18" charset="-127"/>
-                <a:ea typeface="휴먼모음T" panose="02030504000101010101" pitchFamily="18" charset="-127"/>
-              </a:rPr>
-              <a:t>이어서 멈출 수 없네</a:t>
-            </a:r>
-            <a:r>
-              <a:rPr lang="en-US" altLang="ko-KR" sz="4800" b="1" spc="-300" dirty="0">
-                <a:ln w="9525">
-                  <a:solidFill>
-                    <a:prstClr val="black"/>
-                  </a:solidFill>
-                </a:ln>
-                <a:solidFill>
-                  <a:srgbClr val="FFFF00"/>
-                </a:solidFill>
-                <a:latin typeface="휴먼모음T" panose="02030504000101010101" pitchFamily="18" charset="-127"/>
-                <a:ea typeface="휴먼모음T" panose="02030504000101010101" pitchFamily="18" charset="-127"/>
-              </a:rPr>
-              <a:t>)</a:t>
-            </a:r>
-          </a:p>
-          <a:p>
-            <a:pPr marL="0" marR="0" lvl="0" indent="0" algn="ctr" defTabSz="914400" rtl="0" eaLnBrk="1" fontAlgn="auto" latinLnBrk="1" hangingPunct="1">
-              <a:lnSpc>
-                <a:spcPct val="100000"/>
-              </a:lnSpc>
-              <a:spcBef>
-                <a:spcPts val="0"/>
-              </a:spcBef>
-              <a:spcAft>
-                <a:spcPts val="0"/>
-              </a:spcAft>
-              <a:buClrTx/>
-              <a:buSzTx/>
-              <a:buFontTx/>
-              <a:buNone/>
-              <a:tabLst/>
-              <a:defRPr/>
-            </a:pPr>
-            <a:endParaRPr lang="en-US" altLang="ko-KR" sz="4800" b="1" spc="-300" dirty="0">
-              <a:ln w="9525">
-                <a:solidFill>
-                  <a:prstClr val="black"/>
-                </a:solidFill>
-              </a:ln>
-              <a:solidFill>
-                <a:srgbClr val="FFFF00"/>
-              </a:solidFill>
-              <a:latin typeface="휴먼모음T" panose="02030504000101010101" pitchFamily="18" charset="-127"/>
-              <a:ea typeface="휴먼모음T" panose="02030504000101010101" pitchFamily="18" charset="-127"/>
-            </a:endParaRPr>
-          </a:p>
         </p:txBody>
       </p:sp>
     </p:spTree>
     <p:extLst>
       <p:ext uri="{BB962C8B-B14F-4D97-AF65-F5344CB8AC3E}">
-        <p14:creationId xmlns:p14="http://schemas.microsoft.com/office/powerpoint/2010/main" val="4155744473"/>
+        <p14:creationId xmlns:p14="http://schemas.microsoft.com/office/powerpoint/2010/main" val="1727855894"/>
       </p:ext>
     </p:extLst>
   </p:cSld>
@@ -4383,7 +4239,7 @@
         <p:cNvPr id="1" name="">
           <a:extLst>
             <a:ext uri="{FF2B5EF4-FFF2-40B4-BE49-F238E27FC236}">
-              <a16:creationId xmlns:a16="http://schemas.microsoft.com/office/drawing/2014/main" id="{F1A22829-1471-F0C9-5F67-8B6AFA63C7E7}"/>
+              <a16:creationId xmlns:a16="http://schemas.microsoft.com/office/drawing/2014/main" id="{0E7E5254-43D9-CB76-D05E-F49A043D4EAF}"/>
             </a:ext>
           </a:extLst>
         </p:cNvPr>
@@ -4403,7 +4259,7 @@
           <p:cNvPr id="2" name="TextBox 1">
             <a:extLst>
               <a:ext uri="{FF2B5EF4-FFF2-40B4-BE49-F238E27FC236}">
-                <a16:creationId xmlns:a16="http://schemas.microsoft.com/office/drawing/2014/main" id="{B143E221-FB5F-DF57-01A2-0859509884A4}"/>
+                <a16:creationId xmlns:a16="http://schemas.microsoft.com/office/drawing/2014/main" id="{901DA3D3-67F2-AF4C-CD90-5184A55D6D79}"/>
               </a:ext>
             </a:extLst>
           </p:cNvPr>
@@ -4444,7 +4300,7 @@
               <a:defRPr/>
             </a:pPr>
             <a:r>
-              <a:rPr lang="en-US" altLang="ko-KR" sz="7200" b="1" spc="-300" dirty="0">
+              <a:rPr lang="en-US" altLang="ko-KR" sz="7200" b="1" spc="-300" dirty="0" err="1">
                 <a:ln w="9525">
                   <a:solidFill>
                     <a:prstClr val="black"/>
@@ -4456,7 +4312,7 @@
                 <a:latin typeface="휴먼모음T" panose="02030504000101010101" pitchFamily="18" charset="-127"/>
                 <a:ea typeface="휴먼모음T" panose="02030504000101010101" pitchFamily="18" charset="-127"/>
               </a:rPr>
-              <a:t>C1</a:t>
+              <a:t>Cb</a:t>
             </a:r>
             <a:r>
               <a:rPr kumimoji="0" lang="en-US" altLang="ko-KR" sz="7200" b="1" i="0" u="none" strike="noStrike" kern="1200" cap="none" spc="-300" normalizeH="0" baseline="0" noProof="0" dirty="0">
@@ -4494,7 +4350,26 @@
                 <a:ea typeface="휴먼모음T" panose="02030504000101010101" pitchFamily="18" charset="-127"/>
                 <a:cs typeface="+mn-cs"/>
               </a:rPr>
-              <a:t>주 날 구원했으니</a:t>
+              <a:t>주 날 </a:t>
+            </a:r>
+            <a:r>
+              <a:rPr kumimoji="0" lang="ko-KR" altLang="en-US" sz="7200" b="1" i="0" u="none" strike="noStrike" kern="1200" cap="none" spc="-300" normalizeH="0" baseline="0" noProof="0" dirty="0" err="1">
+                <a:ln w="9525">
+                  <a:solidFill>
+                    <a:prstClr val="black"/>
+                  </a:solidFill>
+                </a:ln>
+                <a:solidFill>
+                  <a:prstClr val="white"/>
+                </a:solidFill>
+                <a:effectLst/>
+                <a:uLnTx/>
+                <a:uFillTx/>
+                <a:latin typeface="휴먼모음T" panose="02030504000101010101" pitchFamily="18" charset="-127"/>
+                <a:ea typeface="휴먼모음T" panose="02030504000101010101" pitchFamily="18" charset="-127"/>
+                <a:cs typeface="+mn-cs"/>
+              </a:rPr>
+              <a:t>죄사했으니</a:t>
             </a:r>
             <a:endParaRPr kumimoji="0" lang="en-US" altLang="ko-KR" sz="7200" b="1" i="0" u="none" strike="noStrike" kern="1200" cap="none" spc="-300" normalizeH="0" baseline="0" noProof="0" dirty="0">
               <a:ln w="9525">
@@ -4613,7 +4488,7 @@
                 <a:latin typeface="휴먼모음T" panose="02030504000101010101" pitchFamily="18" charset="-127"/>
                 <a:ea typeface="휴먼모음T" panose="02030504000101010101" pitchFamily="18" charset="-127"/>
               </a:rPr>
-              <a:t>찬송드리리</a:t>
+              <a:t>경배드리리</a:t>
             </a:r>
             <a:endParaRPr lang="en-US" altLang="ko-KR" sz="7200" b="1" spc="-300" dirty="0">
               <a:ln w="9525">
@@ -4633,7 +4508,7 @@
     </p:spTree>
     <p:extLst>
       <p:ext uri="{BB962C8B-B14F-4D97-AF65-F5344CB8AC3E}">
-        <p14:creationId xmlns:p14="http://schemas.microsoft.com/office/powerpoint/2010/main" val="1727855894"/>
+        <p14:creationId xmlns:p14="http://schemas.microsoft.com/office/powerpoint/2010/main" val="86449666"/>
       </p:ext>
     </p:extLst>
   </p:cSld>
@@ -4659,301 +4534,6 @@
         <p:cNvPr id="1" name="">
           <a:extLst>
             <a:ext uri="{FF2B5EF4-FFF2-40B4-BE49-F238E27FC236}">
-              <a16:creationId xmlns:a16="http://schemas.microsoft.com/office/drawing/2014/main" id="{0E7E5254-43D9-CB76-D05E-F49A043D4EAF}"/>
-            </a:ext>
-          </a:extLst>
-        </p:cNvPr>
-        <p:cNvGrpSpPr/>
-        <p:nvPr/>
-      </p:nvGrpSpPr>
-      <p:grpSpPr>
-        <a:xfrm>
-          <a:off x="0" y="0"/>
-          <a:ext cx="0" cy="0"/>
-          <a:chOff x="0" y="0"/>
-          <a:chExt cx="0" cy="0"/>
-        </a:xfrm>
-      </p:grpSpPr>
-      <p:sp>
-        <p:nvSpPr>
-          <p:cNvPr id="2" name="TextBox 1">
-            <a:extLst>
-              <a:ext uri="{FF2B5EF4-FFF2-40B4-BE49-F238E27FC236}">
-                <a16:creationId xmlns:a16="http://schemas.microsoft.com/office/drawing/2014/main" id="{901DA3D3-67F2-AF4C-CD90-5184A55D6D79}"/>
-              </a:ext>
-            </a:extLst>
-          </p:cNvPr>
-          <p:cNvSpPr txBox="1"/>
-          <p:nvPr/>
-        </p:nvSpPr>
-        <p:spPr>
-          <a:xfrm>
-            <a:off x="0" y="635505"/>
-            <a:ext cx="12192000" cy="5469203"/>
-          </a:xfrm>
-          <a:prstGeom prst="rect">
-            <a:avLst/>
-          </a:prstGeom>
-          <a:noFill/>
-        </p:spPr>
-        <p:txBody>
-          <a:bodyPr wrap="square">
-            <a:noAutofit/>
-          </a:bodyPr>
-          <a:lstStyle/>
-          <a:p>
-            <a:pPr marL="0" marR="0" lvl="0" indent="0" algn="ctr" defTabSz="914400" rtl="0" eaLnBrk="1" fontAlgn="auto" latinLnBrk="1" hangingPunct="1">
-              <a:lnSpc>
-                <a:spcPct val="100000"/>
-              </a:lnSpc>
-              <a:spcBef>
-                <a:spcPts val="0"/>
-              </a:spcBef>
-              <a:spcAft>
-                <a:spcPts val="0"/>
-              </a:spcAft>
-              <a:buClrTx/>
-              <a:buSzTx/>
-              <a:buFontTx/>
-              <a:buNone/>
-              <a:tabLst/>
-              <a:defRPr/>
-            </a:pPr>
-            <a:r>
-              <a:rPr lang="en-US" altLang="ko-KR" sz="7200" b="1" spc="-300" dirty="0">
-                <a:ln w="9525">
-                  <a:solidFill>
-                    <a:prstClr val="black"/>
-                  </a:solidFill>
-                </a:ln>
-                <a:solidFill>
-                  <a:prstClr val="white"/>
-                </a:solidFill>
-                <a:latin typeface="휴먼모음T" panose="02030504000101010101" pitchFamily="18" charset="-127"/>
-                <a:ea typeface="휴먼모음T" panose="02030504000101010101" pitchFamily="18" charset="-127"/>
-              </a:rPr>
-              <a:t>C2</a:t>
-            </a:r>
-            <a:r>
-              <a:rPr kumimoji="0" lang="en-US" altLang="ko-KR" sz="7200" b="1" i="0" u="none" strike="noStrike" kern="1200" cap="none" spc="-300" normalizeH="0" baseline="0" noProof="0" dirty="0">
-                <a:ln w="9525">
-                  <a:solidFill>
-                    <a:prstClr val="black"/>
-                  </a:solidFill>
-                </a:ln>
-                <a:solidFill>
-                  <a:prstClr val="white"/>
-                </a:solidFill>
-                <a:effectLst/>
-                <a:uLnTx/>
-                <a:uFillTx/>
-                <a:latin typeface="휴먼모음T" panose="02030504000101010101" pitchFamily="18" charset="-127"/>
-                <a:ea typeface="휴먼모음T" panose="02030504000101010101" pitchFamily="18" charset="-127"/>
-                <a:cs typeface="+mn-cs"/>
-              </a:rPr>
-              <a:t> </a:t>
-            </a:r>
-            <a:r>
-              <a:rPr kumimoji="0" lang="ko-KR" altLang="en-US" sz="7200" b="1" i="0" u="none" strike="noStrike" kern="1200" cap="none" spc="-300" normalizeH="0" baseline="0" noProof="0" dirty="0">
-                <a:ln w="9525">
-                  <a:solidFill>
-                    <a:prstClr val="black"/>
-                  </a:solidFill>
-                </a:ln>
-                <a:solidFill>
-                  <a:prstClr val="white"/>
-                </a:solidFill>
-                <a:effectLst/>
-                <a:uLnTx/>
-                <a:uFillTx/>
-                <a:latin typeface="휴먼모음T" panose="02030504000101010101" pitchFamily="18" charset="-127"/>
-                <a:ea typeface="휴먼모음T" panose="02030504000101010101" pitchFamily="18" charset="-127"/>
-                <a:cs typeface="+mn-cs"/>
-              </a:rPr>
-              <a:t>주 날 </a:t>
-            </a:r>
-            <a:r>
-              <a:rPr kumimoji="0" lang="ko-KR" altLang="en-US" sz="7200" b="1" i="0" u="none" strike="noStrike" kern="1200" cap="none" spc="-300" normalizeH="0" baseline="0" noProof="0" dirty="0" err="1">
-                <a:ln w="9525">
-                  <a:solidFill>
-                    <a:prstClr val="black"/>
-                  </a:solidFill>
-                </a:ln>
-                <a:solidFill>
-                  <a:prstClr val="white"/>
-                </a:solidFill>
-                <a:effectLst/>
-                <a:uLnTx/>
-                <a:uFillTx/>
-                <a:latin typeface="휴먼모음T" panose="02030504000101010101" pitchFamily="18" charset="-127"/>
-                <a:ea typeface="휴먼모음T" panose="02030504000101010101" pitchFamily="18" charset="-127"/>
-                <a:cs typeface="+mn-cs"/>
-              </a:rPr>
-              <a:t>죄사했으니</a:t>
-            </a:r>
-            <a:endParaRPr kumimoji="0" lang="en-US" altLang="ko-KR" sz="7200" b="1" i="0" u="none" strike="noStrike" kern="1200" cap="none" spc="-300" normalizeH="0" baseline="0" noProof="0" dirty="0">
-              <a:ln w="9525">
-                <a:solidFill>
-                  <a:prstClr val="black"/>
-                </a:solidFill>
-              </a:ln>
-              <a:solidFill>
-                <a:prstClr val="white"/>
-              </a:solidFill>
-              <a:effectLst/>
-              <a:uLnTx/>
-              <a:uFillTx/>
-              <a:latin typeface="휴먼모음T" panose="02030504000101010101" pitchFamily="18" charset="-127"/>
-              <a:ea typeface="휴먼모음T" panose="02030504000101010101" pitchFamily="18" charset="-127"/>
-              <a:cs typeface="+mn-cs"/>
-            </a:endParaRPr>
-          </a:p>
-          <a:p>
-            <a:pPr marL="0" marR="0" lvl="0" indent="0" algn="ctr" defTabSz="914400" rtl="0" eaLnBrk="1" fontAlgn="auto" latinLnBrk="1" hangingPunct="1">
-              <a:lnSpc>
-                <a:spcPct val="100000"/>
-              </a:lnSpc>
-              <a:spcBef>
-                <a:spcPts val="0"/>
-              </a:spcBef>
-              <a:spcAft>
-                <a:spcPts val="0"/>
-              </a:spcAft>
-              <a:buClrTx/>
-              <a:buSzTx/>
-              <a:buFontTx/>
-              <a:buNone/>
-              <a:tabLst/>
-              <a:defRPr/>
-            </a:pPr>
-            <a:r>
-              <a:rPr kumimoji="0" lang="ko-KR" altLang="en-US" sz="7200" b="1" i="0" u="none" strike="noStrike" kern="1200" cap="none" spc="-300" normalizeH="0" baseline="0" noProof="0" dirty="0">
-                <a:ln w="9525">
-                  <a:solidFill>
-                    <a:prstClr val="black"/>
-                  </a:solidFill>
-                </a:ln>
-                <a:solidFill>
-                  <a:prstClr val="white"/>
-                </a:solidFill>
-                <a:effectLst/>
-                <a:uLnTx/>
-                <a:uFillTx/>
-                <a:latin typeface="휴먼모음T" panose="02030504000101010101" pitchFamily="18" charset="-127"/>
-                <a:ea typeface="휴먼모음T" panose="02030504000101010101" pitchFamily="18" charset="-127"/>
-                <a:cs typeface="+mn-cs"/>
-              </a:rPr>
-              <a:t>어찌 잠잠하리</a:t>
-            </a:r>
-            <a:endParaRPr kumimoji="0" lang="en-US" altLang="ko-KR" sz="7200" b="1" i="0" u="none" strike="noStrike" kern="1200" cap="none" spc="-300" normalizeH="0" baseline="0" noProof="0" dirty="0">
-              <a:ln w="9525">
-                <a:solidFill>
-                  <a:prstClr val="black"/>
-                </a:solidFill>
-              </a:ln>
-              <a:solidFill>
-                <a:prstClr val="white"/>
-              </a:solidFill>
-              <a:effectLst/>
-              <a:uLnTx/>
-              <a:uFillTx/>
-              <a:latin typeface="휴먼모음T" panose="02030504000101010101" pitchFamily="18" charset="-127"/>
-              <a:ea typeface="휴먼모음T" panose="02030504000101010101" pitchFamily="18" charset="-127"/>
-              <a:cs typeface="+mn-cs"/>
-            </a:endParaRPr>
-          </a:p>
-          <a:p>
-            <a:pPr marL="0" marR="0" lvl="0" indent="0" algn="ctr" defTabSz="914400" rtl="0" eaLnBrk="1" fontAlgn="auto" latinLnBrk="1" hangingPunct="1">
-              <a:lnSpc>
-                <a:spcPct val="100000"/>
-              </a:lnSpc>
-              <a:spcBef>
-                <a:spcPts val="0"/>
-              </a:spcBef>
-              <a:spcAft>
-                <a:spcPts val="0"/>
-              </a:spcAft>
-              <a:buClrTx/>
-              <a:buSzTx/>
-              <a:buFontTx/>
-              <a:buNone/>
-              <a:tabLst/>
-              <a:defRPr/>
-            </a:pPr>
-            <a:r>
-              <a:rPr lang="ko-KR" altLang="en-US" sz="7200" b="1" spc="-300" dirty="0">
-                <a:ln w="9525">
-                  <a:solidFill>
-                    <a:prstClr val="black"/>
-                  </a:solidFill>
-                </a:ln>
-                <a:solidFill>
-                  <a:prstClr val="white"/>
-                </a:solidFill>
-                <a:latin typeface="휴먼모음T" panose="02030504000101010101" pitchFamily="18" charset="-127"/>
-                <a:ea typeface="휴먼모음T" panose="02030504000101010101" pitchFamily="18" charset="-127"/>
-              </a:rPr>
-              <a:t>기쁨의 </a:t>
-            </a:r>
-            <a:r>
-              <a:rPr lang="ko-KR" altLang="en-US" sz="7200" b="1" spc="-300" dirty="0" err="1">
-                <a:ln w="9525">
-                  <a:solidFill>
-                    <a:prstClr val="black"/>
-                  </a:solidFill>
-                </a:ln>
-                <a:solidFill>
-                  <a:prstClr val="white"/>
-                </a:solidFill>
-                <a:latin typeface="휴먼모음T" panose="02030504000101010101" pitchFamily="18" charset="-127"/>
-                <a:ea typeface="휴먼모음T" panose="02030504000101010101" pitchFamily="18" charset="-127"/>
-              </a:rPr>
-              <a:t>경배드리리</a:t>
-            </a:r>
-            <a:endParaRPr lang="en-US" altLang="ko-KR" sz="7200" b="1" spc="-300" dirty="0">
-              <a:ln w="9525">
-                <a:solidFill>
-                  <a:prstClr val="black"/>
-                </a:solidFill>
-              </a:ln>
-              <a:solidFill>
-                <a:prstClr val="white"/>
-              </a:solidFill>
-              <a:latin typeface="휴먼모음T" panose="02030504000101010101" pitchFamily="18" charset="-127"/>
-              <a:ea typeface="휴먼모음T" panose="02030504000101010101" pitchFamily="18" charset="-127"/>
-            </a:endParaRPr>
-          </a:p>
-        </p:txBody>
-      </p:sp>
-    </p:spTree>
-    <p:extLst>
-      <p:ext uri="{BB962C8B-B14F-4D97-AF65-F5344CB8AC3E}">
-        <p14:creationId xmlns:p14="http://schemas.microsoft.com/office/powerpoint/2010/main" val="86449666"/>
-      </p:ext>
-    </p:extLst>
-  </p:cSld>
-  <p:clrMapOvr>
-    <a:masterClrMapping/>
-  </p:clrMapOvr>
-  <mc:AlternateContent xmlns:mc="http://schemas.openxmlformats.org/markup-compatibility/2006" xmlns:p14="http://schemas.microsoft.com/office/powerpoint/2010/main">
-    <mc:Choice Requires="p14">
-      <p:transition p14:dur="0"/>
-    </mc:Choice>
-    <mc:Fallback xmlns="">
-      <p:transition/>
-    </mc:Fallback>
-  </mc:AlternateContent>
-</p:sld>
-</file>
-
-<file path=ppt/slides/slide7.xml><?xml version="1.0" encoding="utf-8"?>
-<p:sld xmlns:a="http://schemas.openxmlformats.org/drawingml/2006/main" xmlns:r="http://schemas.openxmlformats.org/officeDocument/2006/relationships" xmlns:p="http://schemas.openxmlformats.org/presentationml/2006/main">
-  <p:cSld>
-    <p:spTree>
-      <p:nvGrpSpPr>
-        <p:cNvPr id="1" name="">
-          <a:extLst>
-            <a:ext uri="{FF2B5EF4-FFF2-40B4-BE49-F238E27FC236}">
               <a16:creationId xmlns:a16="http://schemas.microsoft.com/office/drawing/2014/main" id="{489B33A9-C48E-711D-6198-C34FFD399741}"/>
             </a:ext>
           </a:extLst>
@@ -5253,7 +4833,7 @@
 </p:sld>
 </file>
 
-<file path=ppt/slides/slide8.xml><?xml version="1.0" encoding="utf-8"?>
+<file path=ppt/slides/slide7.xml><?xml version="1.0" encoding="utf-8"?>
 <p:sld xmlns:a="http://schemas.openxmlformats.org/drawingml/2006/main" xmlns:r="http://schemas.openxmlformats.org/officeDocument/2006/relationships" xmlns:p="http://schemas.openxmlformats.org/presentationml/2006/main">
   <p:cSld>
     <p:spTree>
